--- a/reports/6g-data-fabric-strategy-deck.pptx
+++ b/reports/6g-data-fabric-strategy-deck.pptx
@@ -4079,7 +4079,7 @@
                 <a:latin typeface="Microsoft YaHei"/>
                 <a:eastAsian typeface="Microsoft YaHei"/>
               </a:rPr>
-              <a:t>落地：先做移动性/节能/故障/QoE/模型训练高复用产品；必须带对象范围、事件时间、语义版本、QoD、用途、Owner。</a:t>
+              <a:t>落地：先做移动性/节能/故障/QoE/模型训练高复用产品；必须带对象范围、事件时间、语义版本、任务适用性、用途、Owner。</a:t>
             </a:r>
           </a:p>
           <a:p>
@@ -4870,7 +4870,7 @@
                 <a:latin typeface="Microsoft YaHei"/>
                 <a:eastAsian typeface="Microsoft YaHei"/>
               </a:rPr>
-              <a:t>后半因果链：证据闸门 → QoD标尺 → 商业分层 → 能力集合化</a:t>
+              <a:t>后半因果链：证据闸门 → 任务适用性标尺 → 商业分层 → 能力集合化</a:t>
             </a:r>
           </a:p>
         </p:txBody>
@@ -4946,7 +4946,7 @@
                 <a:latin typeface="Microsoft YaHei"/>
                 <a:eastAsian typeface="Microsoft YaHei"/>
               </a:rPr>
-              <a:t>T5–T8回答「如何证明、计量与标准化」：高风险动作要孪生证据，无线数据要通信级QoD，商业走内部产品→API→渠道分层，标准更可能冻结能力集合而非固定新网元。</a:t>
+              <a:t>T5–T8回答「如何证明、计量与标准化」：高风险动作要孪生证据，无线数据要通信级任务适用性，商业走内部产品→API→渠道分层，标准更可能冻结能力集合而非固定新网元。</a:t>
             </a:r>
           </a:p>
         </p:txBody>
@@ -5149,7 +5149,7 @@
                 <a:latin typeface="Microsoft YaHei"/>
                 <a:eastAsian typeface="Microsoft YaHei"/>
               </a:rPr>
-              <a:t>QoD成为6G数据标准与产品竞争核心标尺</a:t>
+              <a:t>任务适用性规则成为6G数据接口与产品竞争核心标尺</a:t>
             </a:r>
           </a:p>
           <a:p>
@@ -5183,7 +5183,7 @@
                 <a:latin typeface="Microsoft YaHei"/>
                 <a:eastAsian typeface="Microsoft YaHei"/>
               </a:rPr>
-              <a:t>落地：按数据族建质量信封；纳入采样覆盖、时空代表性、同步、配置、标签来源、训练—服务偏差；绑定产品SLO与动作风险。</a:t>
+              <a:t>落地：按数据族建适用性信封；纳入采样覆盖、时空代表性、同步、配置、标签来源、训练—服务偏差；绑定产品SLO与动作风险。</a:t>
             </a:r>
           </a:p>
           <a:p>
@@ -5999,7 +5999,7 @@
                 <a:latin typeface="Microsoft YaHei"/>
                 <a:eastAsian typeface="Microsoft YaHei"/>
               </a:rPr>
-              <a:t>元数据事件、跨O1/E2/A1/R1映射、RAN QoD、数据契约、模型/动作血缘成领先试点基线。</a:t>
+              <a:t>元数据事件、跨O1/E2/A1/R1映射、RAN数据适用性、数据契约、模型/动作血缘成领先试点基线。</a:t>
             </a:r>
           </a:p>
           <a:p>
@@ -6262,7 +6262,7 @@
                 <a:latin typeface="Microsoft YaHei"/>
                 <a:eastAsian typeface="Microsoft YaHei"/>
               </a:rPr>
-              <a:t>多厂商语义映射、QoD标准、Agent可信运行时、NDT证据门槛、跨域产品运营形成长期壁垒。</a:t>
+              <a:t>多厂商语义映射、任务适用性表达与测试规则、Agent可信运行时、NDT证据门槛、跨域产品运营形成长期壁垒。</a:t>
             </a:r>
           </a:p>
         </p:txBody>
@@ -6841,7 +6841,7 @@
                 <a:latin typeface="Microsoft YaHei"/>
                 <a:eastAsian typeface="Microsoft YaHei"/>
               </a:rPr>
-              <a:t>02  [高确定性]  RAN语义与QoD比原始数据规模更稀缺</a:t>
+              <a:t>02  [高确定性]  RAN语义与任务适用性比原始数据规模更稀缺</a:t>
             </a:r>
           </a:p>
         </p:txBody>
@@ -8118,7 +8118,7 @@
                 <a:latin typeface="Microsoft YaHei"/>
                 <a:eastAsian typeface="Microsoft YaHei"/>
               </a:rPr>
-              <a:t>正确战略不是再造对标 IBM/Informatica/Nokia Data Suite 的通用编织平台，而是把 AIR Net 数据引擎升级为主航道共用的横向数据控制能力；争夺「语义+QoD+近源执行+有界供数」，而非「大一统数据面」品牌。</a:t>
+              <a:t>正确战略不是再造对标 IBM/Informatica/Nokia Data Suite 的通用编织平台，而是把 AIR Net 数据引擎升级为主航道共用的横向数据控制能力；争夺「语义+任务适用性+近源执行+有界供数」，而非「大一统数据面」品牌。</a:t>
             </a:r>
           </a:p>
         </p:txBody>
@@ -8473,7 +8473,7 @@
                 <a:latin typeface="Microsoft YaHei"/>
                 <a:eastAsian typeface="Microsoft YaHei"/>
               </a:rPr>
-              <a:t>中国移动QoD：CAMARA+中兴NEF；25家客户、月调用&gt;3400万、收入证据</a:t>
+              <a:t>中国移动Quality on Demand（QoD）：CAMARA+中兴NEF；25家客户、月调用&gt;3400万、收入证据</a:t>
             </a:r>
           </a:p>
         </p:txBody>
@@ -8853,7 +8853,7 @@
                 <a:latin typeface="Microsoft YaHei"/>
                 <a:eastAsian typeface="Microsoft YaHei"/>
               </a:rPr>
-              <a:t>RAN QoD/近源Agent/跨接口事件 → 待PoC与付费验证</a:t>
+              <a:t>RAN数据适用性/近源Agent/跨接口事件 → 待PoC与付费验证</a:t>
             </a:r>
           </a:p>
         </p:txBody>
@@ -9330,7 +9330,7 @@
                 <a:latin typeface="Microsoft YaHei"/>
                 <a:eastAsian typeface="Microsoft YaHei"/>
               </a:rPr>
-              <a:t>C1 语义与 QoD</a:t>
+              <a:t>C1 语义与任务适用性</a:t>
             </a:r>
           </a:p>
           <a:p>
@@ -9347,7 +9347,7 @@
                 <a:latin typeface="Microsoft YaHei"/>
                 <a:eastAsian typeface="Microsoft YaHei"/>
               </a:rPr>
-              <a:t>对象映射·质量信封·配置/时空/采样</a:t>
+              <a:t>对象映射·适用性信封·配置/时空/采样</a:t>
             </a:r>
           </a:p>
           <a:p>
@@ -10399,7 +10399,7 @@
                 <a:latin typeface="Microsoft YaHei"/>
                 <a:eastAsian typeface="Microsoft YaHei"/>
               </a:rPr>
-              <a:t>用 AIR Net 数据引擎抢占「电信语义—QoD—近源执行—有界供数」四位一体控制点；以 ZSM 029 / SA2·SA5 把接口与语义写成标准事实，以场景闭环证明价值——而不是先宣称拥有完整 6G Data Fabric。</a:t>
+              <a:t>用 AIR Net 数据引擎抢占「电信语义—任务适用性—近源执行—有界供数」四位一体控制点；以 ZSM 029 / SA2·SA5 把接口与语义写成标准事实，以场景闭环证明价值——而不是先宣称拥有完整 6G Data Fabric。</a:t>
             </a:r>
           </a:p>
         </p:txBody>
@@ -10977,7 +10977,7 @@
                           <a:latin typeface="Microsoft YaHei"/>
                           <a:eastAsian typeface="Microsoft YaHei"/>
                         </a:rPr>
-                        <a:t>从资产目录升级为Owner/SLO/QoD/退出</a:t>
+                        <a:t>从资产目录升级为Owner/SLO/任务适用性/退出</a:t>
                       </a:r>
                     </a:p>
                   </a:txBody>
@@ -11284,7 +11284,7 @@
                           <a:latin typeface="Microsoft YaHei"/>
                           <a:eastAsian typeface="Microsoft YaHei"/>
                         </a:rPr>
-                        <a:t>RAN QoD</a:t>
+                        <a:t>RAN数据适用性</a:t>
                       </a:r>
                     </a:p>
                   </a:txBody>
@@ -11533,7 +11533,7 @@
                 <a:latin typeface="Microsoft YaHei"/>
                 <a:eastAsian typeface="Microsoft YaHei"/>
               </a:rPr>
-              <a:t>服务无线/核网/承载/SMO/行业；统一控制语义+分布式执行；数据引擎升级为产品/QoD/证据/供数底座。</a:t>
+              <a:t>服务无线/核网/承载/SMO/行业；统一控制语义+分布式执行；数据引擎升级为产品/任务适用性/证据/供数底座。</a:t>
             </a:r>
           </a:p>
         </p:txBody>
@@ -13527,7 +13527,7 @@
                 <a:latin typeface="Microsoft YaHei"/>
                 <a:eastAsian typeface="Microsoft YaHei"/>
               </a:rPr>
-              <a:t>中兴最优解是「数据引擎外溢 + 标准卡位 + RAN近源QoD + 动作/主权双证据」；用跨场景复用、闭环收益、可回滚性与策略持续强制证明「可信供数」，而不是用功能清单证明「拥有Fabric」。</a:t>
+              <a:t>中兴最优解是「数据引擎外溢 + 标准卡位 + RAN近源任务适用性+ 动作/主权双证据」；用跨场景复用、闭环收益、可回滚性与策略持续强制证明「可信供数」，而不是用功能清单证明「拥有Fabric」。</a:t>
             </a:r>
           </a:p>
         </p:txBody>
@@ -13764,7 +13764,7 @@
                 <a:latin typeface="Microsoft YaHei"/>
                 <a:eastAsian typeface="Microsoft YaHei"/>
               </a:rPr>
-              <a:t>交付：语义/QoD信息模型；DMA服务与生命周期；DCP类总线/DCCF-NWDAF双栈映射。</a:t>
+              <a:t>交付：语义/任务适用性信息模型；DMA服务与生命周期；DCP类总线/DCCF-NWDAF双栈映射。</a:t>
             </a:r>
           </a:p>
           <a:p>
@@ -13891,7 +13891,7 @@
                 <a:latin typeface="Microsoft YaHei"/>
                 <a:eastAsian typeface="Microsoft YaHei"/>
               </a:rPr>
-              <a:t>验收：标注时延/资源、字节减量、断链可用、QoD对模型/闭环改善。</a:t>
+              <a:t>验收：标注时延/资源、字节减量、断链可用、任务适用性对模型/闭环改善。</a:t>
             </a:r>
           </a:p>
           <a:p>
@@ -14673,7 +14673,7 @@
                 <a:latin typeface="Microsoft YaHei"/>
                 <a:eastAsian typeface="Microsoft YaHei"/>
               </a:rPr>
-              <a:t>语义、QoD、契约、工具接口与标准参考实现由同一核心团队负责；标准文稿必须来自可运行代码，核心代码必须对齐标准对象。</a:t>
+              <a:t>语义、任务适用性、契约、工具接口与标准参考实现由同一核心团队负责；标准文稿必须来自可运行代码，核心代码必须对齐标准对象。</a:t>
             </a:r>
           </a:p>
         </p:txBody>
@@ -17071,7 +17071,7 @@
                 <a:latin typeface="Microsoft YaHei"/>
                 <a:eastAsian typeface="Microsoft YaHei"/>
               </a:rPr>
-              <a:t>策略总断言：先把数据引擎做成主航道共用的「可信供数控制面」——用标准写下语义与接口，用近源能力守住RAN QoD，用动作证据与主权策略约束自治和跨组织流通；其余一律后置。【D】条线可推，【R】需公司决策。</a:t>
+              <a:t>策略总断言：先把数据引擎做成主航道共用的「可信供数控制面」——用标准写下语义与接口，用近源能力守住RAN数据适用性，用动作证据与主权策略约束自治和跨组织流通；其余一律后置。【D】条线可推，【R】需公司决策。</a:t>
             </a:r>
           </a:p>
         </p:txBody>
@@ -17629,7 +17629,7 @@
                 <a:latin typeface="Microsoft YaHei"/>
                 <a:eastAsian typeface="Microsoft YaHei"/>
               </a:rPr>
-              <a:t>统一对象/QoD/北向；禁重复造目录</a:t>
+              <a:t>统一对象/任务适用性/北向；禁重复造目录</a:t>
             </a:r>
           </a:p>
         </p:txBody>
@@ -17908,7 +17908,7 @@
                 <a:latin typeface="Microsoft YaHei"/>
                 <a:eastAsian typeface="Microsoft YaHei"/>
               </a:rPr>
-              <a:t>自研语义QoD近源证据；合作湖仓模型</a:t>
+              <a:t>自研语义/任务适用性近源证据；合作湖仓模型</a:t>
             </a:r>
           </a:p>
         </p:txBody>
@@ -18132,7 +18132,7 @@
                 <a:latin typeface="Microsoft YaHei"/>
                 <a:eastAsian typeface="Microsoft YaHei"/>
               </a:rPr>
-              <a:t>Build：语义/QoD/近源Agent/产品契约与动作证据　｜　Partner：湖仓Catalog流批/模型/隐私计算　｜　Buy：连接器扫描可观察工具</a:t>
+              <a:t>Build：语义/任务适用性/近源Agent/产品契约与动作证据　｜　Partner：湖仓Catalog流批/模型/隐私计算　｜　Buy：连接器扫描可观察工具</a:t>
             </a:r>
           </a:p>
         </p:txBody>
@@ -18736,7 +18736,7 @@
                 <a:latin typeface="Microsoft YaHei"/>
                 <a:eastAsian typeface="Microsoft YaHei"/>
               </a:rPr>
-              <a:t>语义/供数MVP；非故障闭环扩展；QoD与主权DSL v0</a:t>
+              <a:t>语义/供数MVP；非故障闭环扩展；任务适用性与主权DSL v0</a:t>
             </a:r>
           </a:p>
         </p:txBody>
@@ -20778,7 +20778,7 @@
                           <a:latin typeface="Microsoft YaHei"/>
                           <a:eastAsian typeface="Microsoft YaHei"/>
                         </a:rPr>
-                        <a:t>DMA参考实现；语义/QoD/双栈提案</a:t>
+                        <a:t>DMA参考实现；语义/任务适用性/双栈提案</a:t>
                       </a:r>
                     </a:p>
                   </a:txBody>
@@ -20872,7 +20872,7 @@
                           <a:latin typeface="Microsoft YaHei"/>
                           <a:eastAsian typeface="Microsoft YaHei"/>
                         </a:rPr>
-                        <a:t>语义包与QoD信封v1</a:t>
+                        <a:t>语义包与任务适用性信封v1</a:t>
                       </a:r>
                     </a:p>
                   </a:txBody>
@@ -21363,7 +21363,7 @@
                           <a:latin typeface="Microsoft YaHei"/>
                           <a:eastAsian typeface="Microsoft YaHei"/>
                         </a:rPr>
-                        <a:t>流内标注/QoD/断链/异步证据</a:t>
+                        <a:t>流内标注/任务适用性/断链/异步证据</a:t>
                       </a:r>
                     </a:p>
                   </a:txBody>
@@ -23020,7 +23020,7 @@
                 <a:latin typeface="Microsoft YaHei"/>
                 <a:eastAsian typeface="Microsoft YaHei"/>
               </a:rPr>
-              <a:t>D2  谁拥有电信语义与QoD最终定义权？→跨线架构Owner；产品线仅域扩展</a:t>
+              <a:t>D2  谁拥有电信语义与任务适用性最终定义权？→跨线架构Owner；产品线仅域扩展</a:t>
             </a:r>
           </a:p>
         </p:txBody>
@@ -23197,7 +23197,7 @@
                 <a:latin typeface="Microsoft YaHei"/>
                 <a:eastAsian typeface="Microsoft YaHei"/>
               </a:rPr>
-              <a:t>D5  如何与云/数据平台分工？→掌握语义QoD近源证据；湖仓Catalog模型开放合作</a:t>
+              <a:t>D5  如何与云/数据平台分工？→掌握语义/任务适用性近源证据；湖仓Catalog模型开放合作</a:t>
             </a:r>
           </a:p>
         </p:txBody>
@@ -23858,7 +23858,7 @@
                           <a:latin typeface="Microsoft YaHei"/>
                           <a:eastAsian typeface="Microsoft YaHei"/>
                         </a:rPr>
-                        <a:t>ZSM029+SA2/SA5建立语义/QoD/接口/测试话语权</a:t>
+                        <a:t>ZSM029+SA2/SA5建立语义/任务适用性/接口/测试话语权</a:t>
                       </a:r>
                     </a:p>
                   </a:txBody>
@@ -23975,7 +23975,7 @@
                           <a:latin typeface="Microsoft YaHei"/>
                           <a:eastAsian typeface="Microsoft YaHei"/>
                         </a:rPr>
-                        <a:t>站点开销、QoD增益、NDT误差、策略一致率</a:t>
+                        <a:t>站点开销、任务适用性增益、NDT误差、策略一致率</a:t>
                       </a:r>
                     </a:p>
                   </a:txBody>
@@ -24949,7 +24949,7 @@
                 <a:latin typeface="Microsoft YaHei"/>
                 <a:eastAsian typeface="Microsoft YaHei"/>
               </a:rPr>
-              <a:t>区分既定积木、Rel-20研究、Rel-21规范、厂商主张与商用产品，避免误判与错过语义/QoD话语权。</a:t>
+              <a:t>区分既定积木、Rel-20研究、Rel-21规范、厂商主张与商用产品，避免误判与错过语义/任务适用性话语权。</a:t>
             </a:r>
           </a:p>
         </p:txBody>
@@ -26410,7 +26410,7 @@
                 <a:latin typeface="Microsoft YaHei"/>
                 <a:eastAsian typeface="Microsoft YaHei"/>
               </a:rPr>
-              <a:t>目录·语义·QoD
+              <a:t>目录·语义· 任务适用性
 血缘·契约·策略·证据</a:t>
             </a:r>
           </a:p>
@@ -27112,7 +27112,7 @@
                 <a:latin typeface="Microsoft YaHei"/>
                 <a:eastAsian typeface="Microsoft YaHei"/>
               </a:rPr>
-              <a:t>通信级数据质量QoD</a:t>
+              <a:t>通信级任务适用性</a:t>
             </a:r>
           </a:p>
         </p:txBody>
@@ -28156,7 +28156,7 @@
                 <a:latin typeface="Microsoft YaHei"/>
                 <a:eastAsian typeface="Microsoft YaHei"/>
               </a:rPr>
-              <a:t>语义 · QoD · 契约 · 策略 · 证据
+              <a:t>语义 · 任务适用性· 契约 · 策略 · 证据
 统一理解与约束，不统一所有存储与时延</a:t>
             </a:r>
           </a:p>
@@ -28613,7 +28613,7 @@
                 <a:latin typeface="Microsoft YaHei"/>
                 <a:eastAsian typeface="Microsoft YaHei"/>
               </a:rPr>
-              <a:t>Data Fabric可做6G数据管理层的设计骨架（尤其Non-RT/跨域供给），但不能原样进入通信网：缺RAN语义、无线QoD、时标隔离、动作安全与多Agent治理；绝不能成为毫秒快环的远端在线依赖。</a:t>
+              <a:t>Data Fabric可做6G数据管理层的设计骨架（尤其Non-RT/跨域供给），但不能原样进入通信网：缺RAN语义、无线数据适用性、时标隔离、动作安全与多Agent治理；绝不能成为毫秒快环的远端在线依赖。</a:t>
             </a:r>
           </a:p>
         </p:txBody>
@@ -28808,7 +28808,7 @@
                 <a:latin typeface="Microsoft YaHei"/>
                 <a:eastAsian typeface="Microsoft YaHei"/>
               </a:rPr>
-              <a:t>补齐 RAN 对象与时空语义、无线 QoD、亚秒时标隔离、动作安全、NDT 证据门槛、多 Agent 冲突治理；不替代 RAN 协议 / SA2·SA5 / O-RAN。</a:t>
+              <a:t>补齐 RAN 对象与时空语义、无线数据适用性、亚秒时标隔离、动作安全、NDT 证据门槛、多 Agent 冲突治理；不替代 RAN 协议 / SA2·SA5 / O-RAN。</a:t>
             </a:r>
           </a:p>
         </p:txBody>
@@ -31489,7 +31489,7 @@
                 <a:latin typeface="Microsoft YaHei"/>
                 <a:eastAsian typeface="Microsoft YaHei"/>
               </a:rPr>
-              <a:t>分布式接入、近源处理、统一语义/QoD、产品化供给，并与AI/Agent和闭环证据关联。</a:t>
+              <a:t>分布式接入、近源处理、统一语义/任务适用性、产品化供给，并与AI/Agent和闭环证据关联。</a:t>
             </a:r>
           </a:p>
         </p:txBody>
@@ -31846,7 +31846,7 @@
                 <a:latin typeface="Microsoft YaHei"/>
                 <a:eastAsian typeface="Microsoft YaHei"/>
               </a:rPr>
-              <a:t>采集/湖仓/流/目录成熟；跨域主动元数据、QoD、Agent治理和高风险闭环仍在G1—G3。</a:t>
+              <a:t>采集/湖仓/流/目录成熟；跨域主动元数据、任务适用性、Agent治理和高风险闭环仍在G1—G3。</a:t>
             </a:r>
           </a:p>
         </p:txBody>
@@ -33153,7 +33153,7 @@
                 <a:latin typeface="Microsoft YaHei"/>
                 <a:eastAsian typeface="Microsoft YaHei"/>
               </a:rPr>
-              <a:t>从管道到事件化控制面：差异化转向元数据激活、跨接口语义、QoD、影响分析与策略强制。</a:t>
+              <a:t>从管道到事件化控制面：差异化转向元数据激活、跨接口语义、任务适用性、影响分析与策略强制。</a:t>
             </a:r>
           </a:p>
         </p:txBody>
@@ -33381,7 +33381,7 @@
                 <a:latin typeface="Microsoft YaHei"/>
                 <a:eastAsian typeface="Microsoft YaHei"/>
               </a:rPr>
-              <a:t>从设备份额到控制点份额：语义、QoD、近源运行时、证据链与API渠道决定软件与生态复利。</a:t>
+              <a:t>从设备份额到控制点份额：语义、任务适用性、近源运行时、证据链与API渠道决定软件与生态复利。</a:t>
             </a:r>
           </a:p>
         </p:txBody>

--- a/reports/6g-data-fabric-strategy-deck.pptx
+++ b/reports/6g-data-fabric-strategy-deck.pptx
@@ -5259,7 +5259,7 @@
                 <a:latin typeface="Microsoft YaHei"/>
                 <a:eastAsian typeface="Microsoft YaHei"/>
               </a:rPr>
-              <a:t>T7 · 中等确定性</a:t>
+              <a:t>T7 · A中高 / B低—中</a:t>
             </a:r>
           </a:p>
           <a:p>
@@ -5276,7 +5276,7 @@
                 <a:latin typeface="Microsoft YaHei"/>
                 <a:eastAsian typeface="Microsoft YaHei"/>
               </a:rPr>
-              <a:t>内部Fabric、数据空间与网络API形成分层商业链</a:t>
+              <a:t>商业化沿责任边界分化：能力服务卖输入，结果服务承诺输出</a:t>
             </a:r>
           </a:p>
           <a:p>
@@ -5293,7 +5293,7 @@
                 <a:latin typeface="Microsoft YaHei"/>
                 <a:eastAsian typeface="Microsoft YaHei"/>
               </a:rPr>
-              <a:t>内部治理=可信生产；网络API=标准消费；Operate API/聚合渠道=规模运营。</a:t>
+              <a:t>买方保留决策与动作权时购买可组合能力；供应方承担决策、动作和效果责任时形成结果型托管服务。</a:t>
             </a:r>
           </a:p>
           <a:p>
@@ -5310,7 +5310,7 @@
                 <a:latin typeface="Microsoft YaHei"/>
                 <a:eastAsian typeface="Microsoft YaHei"/>
               </a:rPr>
-              <a:t>落地：先产品化内部服务再映射CAMARA；计价走向交易/会话/结果；数据空间补跨组织信任，但不进RAN快环。</a:t>
+              <a:t>落地：A按调用/会话/订阅跨网扩张；B先定义结果基线、归因、授权、风险与回滚，再按托管费、增益或结果分成。</a:t>
             </a:r>
           </a:p>
           <a:p>
@@ -5327,7 +5327,7 @@
                 <a:latin typeface="Microsoft YaHei"/>
                 <a:eastAsian typeface="Microsoft YaHei"/>
               </a:rPr>
-              <a:t>反证：API数量增加但无跨网一致、活跃开发者与收入。</a:t>
+              <a:t>反证：A只有API数量无持续收入；B无法定义基线、归因、定责或回退；两条路径混算收入与风险。</a:t>
             </a:r>
           </a:p>
         </p:txBody>
